--- a/sesion-05/Anexo_Ventana_de_contexto_y_RAG.pptx
+++ b/sesion-05/Anexo_Ventana_de_contexto_y_RAG.pptx
@@ -8458,7 +8458,7 @@
                 <a:ea typeface="Calibri" pitchFamily="34" charset="-122"/>
                 <a:cs typeface="Calibri" pitchFamily="34" charset="-120"/>
               </a:rPr>
-              <a:t>Escritorio. Lee lo que adjuntas o referencias; no busca en el contenido de tu OneDrive.</a:t>
+              <a:t>Escritorio, con acceso a tu OneDrive. Eliges tus archivos desde el chat, pero trabaja solo con los que tú agregas; para contestar no recorre los demás.</a:t>
             </a:r>
             <a:endParaRPr lang="en-US" sz="1200" dirty="0"/>
           </a:p>
@@ -8726,7 +8726,7 @@
                 <a:ea typeface="Calibri" pitchFamily="34" charset="-122"/>
                 <a:cs typeface="Calibri" pitchFamily="34" charset="-120"/>
               </a:rPr>
-              <a:t>Es la que pondría a Copilot dentro de Word y Excel. Ojo: a Excel lo encuentra solo por palabras clave, no por significado.</a:t>
+              <a:t>Incluye a Copilot dentro de Word y Excel. Ojo: a Excel lo encuentra solo por palabras clave, no por significado.</a:t>
             </a:r>
             <a:endParaRPr lang="en-US" sz="1200" dirty="0"/>
           </a:p>

--- a/sesion-05/Anexo_Ventana_de_contexto_y_RAG.pptx
+++ b/sesion-05/Anexo_Ventana_de_contexto_y_RAG.pptx
@@ -976,7 +976,7 @@
                 <a:ea typeface="Arial" pitchFamily="34" charset="-122"/>
                 <a:cs typeface="Arial" pitchFamily="34" charset="-120"/>
               </a:rPr>
-              <a:t>Charla opcional · 10 minutos</a:t>
+              <a:t>Material de consulta, con fuentes</a:t>
             </a:r>
             <a:endParaRPr lang="en-US" sz="1200" dirty="0"/>
           </a:p>
